--- a/site/lectures/week10-session2.pptx
+++ b/site/lectures/week10-session2.pptx
@@ -7812,7 +7812,7 @@
                 <a:ea typeface="Calibri" pitchFamily="34" charset="-122"/>
                 <a:cs typeface="Calibri" pitchFamily="34" charset="-120"/>
               </a:rPr>
-              <a:t>A containing AeroLink use case that includes Aircraft Charging and then the Passenger Transport Mission, with the subject declared first and the actors bound (proposed teaching content). Checked: PASS. (FICTIONAL)</a:t>
+              <a:t>A containing AeroLink use case that includes Aircraft Charging and then the Passenger Transport Mission, with the subject declared first and the actors bound. Checked: PASS. (FICTIONAL)</a:t>
             </a:r>
             <a:endParaRPr lang="en-US" sz="1050" dirty="0"/>
           </a:p>
